--- a/01R/02_dplyr_intro.pptx
+++ b/01R/02_dplyr_intro.pptx
@@ -13,7 +13,8 @@
     <p:sldId id="261" r:id="rId7"/>
     <p:sldId id="260" r:id="rId8"/>
     <p:sldId id="263" r:id="rId9"/>
-    <p:sldId id="264" r:id="rId10"/>
+    <p:sldId id="266" r:id="rId10"/>
+    <p:sldId id="264" r:id="rId11"/>
   </p:sldIdLst>
   <p:sldSz cx="12192000" cy="6858000"/>
   <p:notesSz cx="6858000" cy="9144000"/>
@@ -112,6 +113,11 @@
       </a:defRPr>
     </a:lvl9pPr>
   </p:defaultTextStyle>
+  <p:extLst>
+    <p:ext uri="{EFAFB233-063F-42B5-8137-9DF3F51BA10A}">
+      <p15:sldGuideLst xmlns:p15="http://schemas.microsoft.com/office/powerpoint/2012/main"/>
+    </p:ext>
+  </p:extLst>
 </p:presentation>
 </file>
 
@@ -262,7 +268,7 @@
           <a:p>
             <a:fld id="{B6CC3139-8B8E-A041-A6E2-4AFC575B6FE3}" type="datetimeFigureOut">
               <a:rPr lang="fr-FR" smtClean="0"/>
-              <a:t>27/05/2025</a:t>
+              <a:t>29/05/2025</a:t>
             </a:fld>
             <a:endParaRPr lang="fr-FR"/>
           </a:p>
@@ -460,7 +466,7 @@
           <a:p>
             <a:fld id="{B6CC3139-8B8E-A041-A6E2-4AFC575B6FE3}" type="datetimeFigureOut">
               <a:rPr lang="fr-FR" smtClean="0"/>
-              <a:t>27/05/2025</a:t>
+              <a:t>31/05/2025</a:t>
             </a:fld>
             <a:endParaRPr lang="fr-FR"/>
           </a:p>
@@ -668,7 +674,7 @@
           <a:p>
             <a:fld id="{B6CC3139-8B8E-A041-A6E2-4AFC575B6FE3}" type="datetimeFigureOut">
               <a:rPr lang="fr-FR" smtClean="0"/>
-              <a:t>27/05/2025</a:t>
+              <a:t>31/05/2025</a:t>
             </a:fld>
             <a:endParaRPr lang="fr-FR"/>
           </a:p>
@@ -866,7 +872,7 @@
           <a:p>
             <a:fld id="{B6CC3139-8B8E-A041-A6E2-4AFC575B6FE3}" type="datetimeFigureOut">
               <a:rPr lang="fr-FR" smtClean="0"/>
-              <a:t>27/05/2025</a:t>
+              <a:t>29/05/2025</a:t>
             </a:fld>
             <a:endParaRPr lang="fr-FR"/>
           </a:p>
@@ -1141,7 +1147,7 @@
           <a:p>
             <a:fld id="{B6CC3139-8B8E-A041-A6E2-4AFC575B6FE3}" type="datetimeFigureOut">
               <a:rPr lang="fr-FR" smtClean="0"/>
-              <a:t>27/05/2025</a:t>
+              <a:t>29/05/2025</a:t>
             </a:fld>
             <a:endParaRPr lang="fr-FR"/>
           </a:p>
@@ -1406,7 +1412,7 @@
           <a:p>
             <a:fld id="{B6CC3139-8B8E-A041-A6E2-4AFC575B6FE3}" type="datetimeFigureOut">
               <a:rPr lang="fr-FR" smtClean="0"/>
-              <a:t>27/05/2025</a:t>
+              <a:t>29/05/2025</a:t>
             </a:fld>
             <a:endParaRPr lang="fr-FR"/>
           </a:p>
@@ -1818,7 +1824,7 @@
           <a:p>
             <a:fld id="{B6CC3139-8B8E-A041-A6E2-4AFC575B6FE3}" type="datetimeFigureOut">
               <a:rPr lang="fr-FR" smtClean="0"/>
-              <a:t>27/05/2025</a:t>
+              <a:t>31/05/2025</a:t>
             </a:fld>
             <a:endParaRPr lang="fr-FR"/>
           </a:p>
@@ -1959,7 +1965,7 @@
           <a:p>
             <a:fld id="{B6CC3139-8B8E-A041-A6E2-4AFC575B6FE3}" type="datetimeFigureOut">
               <a:rPr lang="fr-FR" smtClean="0"/>
-              <a:t>27/05/2025</a:t>
+              <a:t>31/05/2025</a:t>
             </a:fld>
             <a:endParaRPr lang="fr-FR"/>
           </a:p>
@@ -2072,7 +2078,7 @@
           <a:p>
             <a:fld id="{B6CC3139-8B8E-A041-A6E2-4AFC575B6FE3}" type="datetimeFigureOut">
               <a:rPr lang="fr-FR" smtClean="0"/>
-              <a:t>27/05/2025</a:t>
+              <a:t>29/05/2025</a:t>
             </a:fld>
             <a:endParaRPr lang="fr-FR"/>
           </a:p>
@@ -2383,7 +2389,7 @@
           <a:p>
             <a:fld id="{B6CC3139-8B8E-A041-A6E2-4AFC575B6FE3}" type="datetimeFigureOut">
               <a:rPr lang="fr-FR" smtClean="0"/>
-              <a:t>27/05/2025</a:t>
+              <a:t>29/05/2025</a:t>
             </a:fld>
             <a:endParaRPr lang="fr-FR"/>
           </a:p>
@@ -2671,7 +2677,7 @@
           <a:p>
             <a:fld id="{B6CC3139-8B8E-A041-A6E2-4AFC575B6FE3}" type="datetimeFigureOut">
               <a:rPr lang="fr-FR" smtClean="0"/>
-              <a:t>27/05/2025</a:t>
+              <a:t>31/05/2025</a:t>
             </a:fld>
             <a:endParaRPr lang="fr-FR"/>
           </a:p>
@@ -2912,7 +2918,7 @@
           <a:p>
             <a:fld id="{B6CC3139-8B8E-A041-A6E2-4AFC575B6FE3}" type="datetimeFigureOut">
               <a:rPr lang="fr-FR" smtClean="0"/>
-              <a:t>27/05/2025</a:t>
+              <a:t>29/05/2025</a:t>
             </a:fld>
             <a:endParaRPr lang="fr-FR"/>
           </a:p>
@@ -3438,6 +3444,203 @@
 </p:sld>
 </file>
 
+<file path=ppt/slides/slide10.xml><?xml version="1.0" encoding="utf-8"?>
+<p:sld xmlns:a="http://schemas.openxmlformats.org/drawingml/2006/main" xmlns:r="http://schemas.openxmlformats.org/officeDocument/2006/relationships" xmlns:p="http://schemas.openxmlformats.org/presentationml/2006/main">
+  <p:cSld>
+    <p:spTree>
+      <p:nvGrpSpPr>
+        <p:cNvPr id="1" name=""/>
+        <p:cNvGrpSpPr/>
+        <p:nvPr/>
+      </p:nvGrpSpPr>
+      <p:grpSpPr>
+        <a:xfrm>
+          <a:off x="0" y="0"/>
+          <a:ext cx="0" cy="0"/>
+          <a:chOff x="0" y="0"/>
+          <a:chExt cx="0" cy="0"/>
+        </a:xfrm>
+      </p:grpSpPr>
+      <p:sp>
+        <p:nvSpPr>
+          <p:cNvPr id="5" name="Titre 4">
+            <a:extLst>
+              <a:ext uri="{FF2B5EF4-FFF2-40B4-BE49-F238E27FC236}">
+                <a16:creationId xmlns:a16="http://schemas.microsoft.com/office/drawing/2014/main" id="{9CD0C8C7-C5BF-53E7-9BA9-3E50F930A56F}"/>
+              </a:ext>
+            </a:extLst>
+          </p:cNvPr>
+          <p:cNvSpPr>
+            <a:spLocks noGrp="1"/>
+          </p:cNvSpPr>
+          <p:nvPr>
+            <p:ph type="title"/>
+          </p:nvPr>
+        </p:nvSpPr>
+        <p:spPr/>
+        <p:txBody>
+          <a:bodyPr/>
+          <a:lstStyle/>
+          <a:p>
+            <a:r>
+              <a:rPr lang="fr-FR" dirty="0" err="1"/>
+              <a:t>Exercise</a:t>
+            </a:r>
+            <a:endParaRPr lang="fr-FR" dirty="0"/>
+          </a:p>
+        </p:txBody>
+      </p:sp>
+      <p:sp>
+        <p:nvSpPr>
+          <p:cNvPr id="6" name="Espace réservé du contenu 5">
+            <a:extLst>
+              <a:ext uri="{FF2B5EF4-FFF2-40B4-BE49-F238E27FC236}">
+                <a16:creationId xmlns:a16="http://schemas.microsoft.com/office/drawing/2014/main" id="{F22766EA-0230-3ABE-5998-8ABC1D88AF02}"/>
+              </a:ext>
+            </a:extLst>
+          </p:cNvPr>
+          <p:cNvSpPr>
+            <a:spLocks noGrp="1"/>
+          </p:cNvSpPr>
+          <p:nvPr>
+            <p:ph idx="1"/>
+          </p:nvPr>
+        </p:nvSpPr>
+        <p:spPr/>
+        <p:txBody>
+          <a:bodyPr/>
+          <a:lstStyle/>
+          <a:p>
+            <a:pPr marL="0" indent="0">
+              <a:buNone/>
+            </a:pPr>
+            <a:r>
+              <a:rPr lang="fr-FR" dirty="0" err="1"/>
+              <a:t>Compute</a:t>
+            </a:r>
+            <a:r>
+              <a:rPr lang="fr-FR" dirty="0"/>
+              <a:t> the </a:t>
+            </a:r>
+            <a:r>
+              <a:rPr lang="fr-FR" dirty="0" err="1"/>
+              <a:t>mean</a:t>
+            </a:r>
+            <a:r>
+              <a:rPr lang="fr-FR" dirty="0"/>
+              <a:t> expression of IL1R1 in </a:t>
+            </a:r>
+            <a:r>
+              <a:rPr lang="fr-FR" dirty="0" err="1"/>
+              <a:t>healthy</a:t>
+            </a:r>
+            <a:r>
+              <a:rPr lang="fr-FR" dirty="0"/>
+              <a:t> </a:t>
+            </a:r>
+            <a:r>
+              <a:rPr lang="fr-FR" dirty="0" err="1"/>
+              <a:t>controls</a:t>
+            </a:r>
+            <a:r>
+              <a:rPr lang="fr-FR" dirty="0"/>
+              <a:t> </a:t>
+            </a:r>
+            <a:r>
+              <a:rPr lang="fr-FR" dirty="0" err="1"/>
+              <a:t>using</a:t>
+            </a:r>
+            <a:r>
+              <a:rPr lang="fr-FR" dirty="0"/>
+              <a:t> pipes and </a:t>
+            </a:r>
+            <a:r>
+              <a:rPr lang="fr-FR" dirty="0" err="1"/>
+              <a:t>dplyr</a:t>
+            </a:r>
+            <a:r>
+              <a:rPr lang="fr-FR" dirty="0"/>
+              <a:t> </a:t>
+            </a:r>
+            <a:r>
+              <a:rPr lang="fr-FR" dirty="0" err="1"/>
+              <a:t>verbs</a:t>
+            </a:r>
+            <a:r>
+              <a:rPr lang="fr-FR" dirty="0"/>
+              <a:t> (or base R if </a:t>
+            </a:r>
+            <a:r>
+              <a:rPr lang="fr-FR" dirty="0" err="1"/>
+              <a:t>you</a:t>
+            </a:r>
+            <a:r>
+              <a:rPr lang="fr-FR" dirty="0"/>
+              <a:t> </a:t>
+            </a:r>
+            <a:r>
+              <a:rPr lang="fr-FR" dirty="0" err="1"/>
+              <a:t>prefer</a:t>
+            </a:r>
+            <a:r>
+              <a:rPr lang="fr-FR" dirty="0"/>
+              <a:t>).</a:t>
+            </a:r>
+          </a:p>
+          <a:p>
+            <a:pPr marL="0" indent="0">
+              <a:buNone/>
+            </a:pPr>
+            <a:endParaRPr lang="fr-FR" dirty="0"/>
+          </a:p>
+          <a:p>
+            <a:pPr marL="0" indent="0">
+              <a:buNone/>
+            </a:pPr>
+            <a:r>
+              <a:rPr lang="fr-FR" i="1" dirty="0"/>
+              <a:t>NB: There are </a:t>
+            </a:r>
+            <a:r>
+              <a:rPr lang="fr-FR" i="1" dirty="0" err="1"/>
+              <a:t>several</a:t>
+            </a:r>
+            <a:r>
+              <a:rPr lang="fr-FR" i="1" dirty="0"/>
+              <a:t> possible solutions. Try to </a:t>
+            </a:r>
+            <a:r>
+              <a:rPr lang="fr-FR" i="1" dirty="0" err="1"/>
+              <a:t>find</a:t>
+            </a:r>
+            <a:r>
+              <a:rPr lang="fr-FR" i="1" dirty="0"/>
+              <a:t> at least </a:t>
+            </a:r>
+            <a:r>
+              <a:rPr lang="fr-FR" i="1" dirty="0" err="1"/>
+              <a:t>two</a:t>
+            </a:r>
+            <a:r>
+              <a:rPr lang="fr-FR" i="1" dirty="0"/>
+              <a:t>.</a:t>
+            </a:r>
+          </a:p>
+        </p:txBody>
+      </p:sp>
+    </p:spTree>
+    <p:extLst>
+      <p:ext uri="{BB962C8B-B14F-4D97-AF65-F5344CB8AC3E}">
+        <p14:creationId xmlns:p14="http://schemas.microsoft.com/office/powerpoint/2010/main" val="294582375"/>
+      </p:ext>
+    </p:extLst>
+  </p:cSld>
+  <p:clrMapOvr>
+    <a:masterClrMapping/>
+  </p:clrMapOvr>
+</p:sld>
+</file>
+
 <file path=ppt/slides/slide2.xml><?xml version="1.0" encoding="utf-8"?>
 <p:sld xmlns:a="http://schemas.openxmlformats.org/drawingml/2006/main" xmlns:r="http://schemas.openxmlformats.org/officeDocument/2006/relationships" xmlns:p="http://schemas.openxmlformats.org/presentationml/2006/main">
   <p:cSld>
@@ -4310,6 +4513,46 @@
             <a:r>
               <a:rPr lang="fr-FR" dirty="0"/>
               <a:t> "%&gt;% »</a:t>
+            </a:r>
+          </a:p>
+          <a:p>
+            <a:pPr marL="0" indent="0">
+              <a:buNone/>
+            </a:pPr>
+            <a:endParaRPr lang="fr-FR" dirty="0"/>
+          </a:p>
+          <a:p>
+            <a:pPr marL="0" indent="0">
+              <a:buNone/>
+            </a:pPr>
+            <a:r>
+              <a:rPr lang="fr-FR" b="1" dirty="0">
+                <a:solidFill>
+                  <a:schemeClr val="accent6"/>
+                </a:solidFill>
+              </a:rPr>
+              <a:t>SOLUTION</a:t>
+            </a:r>
+          </a:p>
+          <a:p>
+            <a:pPr marL="0" indent="0">
+              <a:buNone/>
+            </a:pPr>
+            <a:r>
+              <a:rPr lang="fr-FR" dirty="0" err="1"/>
+              <a:t>library</a:t>
+            </a:r>
+            <a:r>
+              <a:rPr lang="fr-FR" dirty="0"/>
+              <a:t>(</a:t>
+            </a:r>
+            <a:r>
+              <a:rPr lang="fr-FR" dirty="0" err="1"/>
+              <a:t>dplyr</a:t>
+            </a:r>
+            <a:r>
+              <a:rPr lang="fr-FR" dirty="0"/>
+              <a:t>)</a:t>
             </a:r>
           </a:p>
           <a:p>
@@ -4436,6 +4679,104 @@
                       </p:childTnLst>
                     </p:cTn>
                   </p:par>
+                  <p:par>
+                    <p:cTn id="11" fill="hold">
+                      <p:stCondLst>
+                        <p:cond delay="indefinite"/>
+                      </p:stCondLst>
+                      <p:childTnLst>
+                        <p:par>
+                          <p:cTn id="12" fill="hold">
+                            <p:stCondLst>
+                              <p:cond delay="0"/>
+                            </p:stCondLst>
+                            <p:childTnLst>
+                              <p:par>
+                                <p:cTn id="13" presetID="1" presetClass="entr" presetSubtype="0" fill="hold" nodeType="clickEffect">
+                                  <p:stCondLst>
+                                    <p:cond delay="0"/>
+                                  </p:stCondLst>
+                                  <p:childTnLst>
+                                    <p:set>
+                                      <p:cBhvr>
+                                        <p:cTn id="14" dur="1" fill="hold">
+                                          <p:stCondLst>
+                                            <p:cond delay="0"/>
+                                          </p:stCondLst>
+                                        </p:cTn>
+                                        <p:tgtEl>
+                                          <p:spTgt spid="4">
+                                            <p:txEl>
+                                              <p:pRg st="3" end="3"/>
+                                            </p:txEl>
+                                          </p:spTgt>
+                                        </p:tgtEl>
+                                        <p:attrNameLst>
+                                          <p:attrName>style.visibility</p:attrName>
+                                        </p:attrNameLst>
+                                      </p:cBhvr>
+                                      <p:to>
+                                        <p:strVal val="visible"/>
+                                      </p:to>
+                                    </p:set>
+                                  </p:childTnLst>
+                                </p:cTn>
+                              </p:par>
+                            </p:childTnLst>
+                          </p:cTn>
+                        </p:par>
+                      </p:childTnLst>
+                    </p:cTn>
+                  </p:par>
+                  <p:par>
+                    <p:cTn id="15" fill="hold">
+                      <p:stCondLst>
+                        <p:cond delay="indefinite"/>
+                      </p:stCondLst>
+                      <p:childTnLst>
+                        <p:par>
+                          <p:cTn id="16" fill="hold">
+                            <p:stCondLst>
+                              <p:cond delay="0"/>
+                            </p:stCondLst>
+                            <p:childTnLst>
+                              <p:par>
+                                <p:cTn id="17" presetID="1" presetClass="entr" presetSubtype="0" fill="hold" nodeType="clickEffect">
+                                  <p:stCondLst>
+                                    <p:cond delay="0"/>
+                                  </p:stCondLst>
+                                  <p:childTnLst>
+                                    <p:set>
+                                      <p:cBhvr>
+                                        <p:cTn id="18" dur="1" fill="hold">
+                                          <p:stCondLst>
+                                            <p:cond delay="0"/>
+                                          </p:stCondLst>
+                                        </p:cTn>
+                                        <p:tgtEl>
+                                          <p:spTgt spid="4">
+                                            <p:txEl>
+                                              <p:pRg st="4" end="4"/>
+                                            </p:txEl>
+                                          </p:spTgt>
+                                        </p:tgtEl>
+                                        <p:attrNameLst>
+                                          <p:attrName>style.visibility</p:attrName>
+                                        </p:attrNameLst>
+                                      </p:cBhvr>
+                                      <p:to>
+                                        <p:strVal val="visible"/>
+                                      </p:to>
+                                    </p:set>
+                                  </p:childTnLst>
+                                </p:cTn>
+                              </p:par>
+                            </p:childTnLst>
+                          </p:cTn>
+                        </p:par>
+                      </p:childTnLst>
+                    </p:cTn>
+                  </p:par>
                 </p:childTnLst>
               </p:cTn>
               <p:prevCondLst>
@@ -4774,13 +5115,7 @@
       </p:grpSpPr>
       <p:sp>
         <p:nvSpPr>
-          <p:cNvPr id="5" name="Titre 4">
-            <a:extLst>
-              <a:ext uri="{FF2B5EF4-FFF2-40B4-BE49-F238E27FC236}">
-                <a16:creationId xmlns:a16="http://schemas.microsoft.com/office/drawing/2014/main" id="{9CD0C8C7-C5BF-53E7-9BA9-3E50F930A56F}"/>
-              </a:ext>
-            </a:extLst>
-          </p:cNvPr>
+          <p:cNvPr id="2" name="Title 1"/>
           <p:cNvSpPr>
             <a:spLocks noGrp="1"/>
           </p:cNvSpPr>
@@ -4794,205 +5129,528 @@
           <a:lstStyle/>
           <a:p>
             <a:r>
-              <a:rPr lang="fr-FR" dirty="0" err="1"/>
-              <a:t>Exercise</a:t>
-            </a:r>
-            <a:endParaRPr lang="fr-FR" dirty="0"/>
-          </a:p>
-        </p:txBody>
-      </p:sp>
-      <p:sp>
-        <p:nvSpPr>
-          <p:cNvPr id="6" name="Espace réservé du contenu 5">
-            <a:extLst>
-              <a:ext uri="{FF2B5EF4-FFF2-40B4-BE49-F238E27FC236}">
-                <a16:creationId xmlns:a16="http://schemas.microsoft.com/office/drawing/2014/main" id="{F22766EA-0230-3ABE-5998-8ABC1D88AF02}"/>
-              </a:ext>
-            </a:extLst>
-          </p:cNvPr>
-          <p:cNvSpPr>
-            <a:spLocks noGrp="1"/>
-          </p:cNvSpPr>
-          <p:nvPr>
-            <p:ph idx="1"/>
+              <a:rPr dirty="0"/>
+              <a:t>Grouping and summarizing</a:t>
+            </a:r>
+          </a:p>
+        </p:txBody>
+      </p:sp>
+      <p:sp>
+        <p:nvSpPr>
+          <p:cNvPr id="3" name="Content Placeholder 2"/>
+          <p:cNvSpPr>
+            <a:spLocks noGrp="1"/>
+          </p:cNvSpPr>
+          <p:nvPr>
+            <p:ph sz="half" idx="1"/>
           </p:nvPr>
         </p:nvSpPr>
         <p:spPr/>
         <p:txBody>
-          <a:bodyPr/>
+          <a:bodyPr>
+            <a:normAutofit fontScale="70000" lnSpcReduction="20000"/>
+          </a:bodyPr>
           <a:lstStyle/>
           <a:p>
             <a:pPr marL="0" indent="0">
               <a:buNone/>
             </a:pPr>
             <a:r>
-              <a:rPr lang="fr-FR" dirty="0" err="1"/>
-              <a:t>Compute</a:t>
-            </a:r>
-            <a:r>
-              <a:rPr lang="fr-FR" dirty="0"/>
-              <a:t> the </a:t>
-            </a:r>
-            <a:r>
-              <a:rPr lang="fr-FR" dirty="0" err="1"/>
+              <a:rPr dirty="0"/>
+              <a:t>Grouping with </a:t>
+            </a:r>
+            <a:r>
+              <a:rPr dirty="0" err="1">
+                <a:latin typeface="Courier"/>
+              </a:rPr>
+              <a:t>group_by</a:t>
+            </a:r>
+            <a:endParaRPr dirty="0">
+              <a:latin typeface="Courier"/>
+            </a:endParaRPr>
+          </a:p>
+          <a:p>
+            <a:pPr indent="0">
+              <a:buNone/>
+            </a:pPr>
+            <a:r>
+              <a:rPr b="1" dirty="0">
+                <a:solidFill>
+                  <a:srgbClr val="003B4F"/>
+                </a:solidFill>
+                <a:latin typeface="Courier"/>
+              </a:rPr>
+              <a:t>covid </a:t>
+            </a:r>
+            <a:r>
+              <a:rPr b="1" dirty="0">
+                <a:solidFill>
+                  <a:srgbClr val="5E5E5E"/>
+                </a:solidFill>
+                <a:latin typeface="Courier"/>
+              </a:rPr>
+              <a:t>|&gt;</a:t>
+            </a:r>
+            <a:br>
+              <a:rPr b="1" dirty="0"/>
+            </a:br>
+            <a:r>
+              <a:rPr b="1" dirty="0">
+                <a:solidFill>
+                  <a:srgbClr val="003B4F"/>
+                </a:solidFill>
+                <a:latin typeface="Courier"/>
+              </a:rPr>
+              <a:t>  </a:t>
+            </a:r>
+            <a:r>
+              <a:rPr b="1" dirty="0" err="1">
+                <a:solidFill>
+                  <a:srgbClr val="4758AB"/>
+                </a:solidFill>
+                <a:latin typeface="Courier"/>
+              </a:rPr>
+              <a:t>group_by</a:t>
+            </a:r>
+            <a:r>
+              <a:rPr b="1" dirty="0">
+                <a:solidFill>
+                  <a:srgbClr val="003B4F"/>
+                </a:solidFill>
+                <a:latin typeface="Courier"/>
+              </a:rPr>
+              <a:t>(id) </a:t>
+            </a:r>
+            <a:r>
+              <a:rPr b="1" dirty="0">
+                <a:solidFill>
+                  <a:srgbClr val="5E5E5E"/>
+                </a:solidFill>
+                <a:latin typeface="Courier"/>
+              </a:rPr>
+              <a:t>|&gt;</a:t>
+            </a:r>
+            <a:br>
+              <a:rPr b="1" dirty="0"/>
+            </a:br>
+            <a:r>
+              <a:rPr b="1" dirty="0">
+                <a:solidFill>
+                  <a:srgbClr val="003B4F"/>
+                </a:solidFill>
+                <a:latin typeface="Courier"/>
+              </a:rPr>
+              <a:t>  </a:t>
+            </a:r>
+            <a:r>
+              <a:rPr b="1" dirty="0">
+                <a:solidFill>
+                  <a:srgbClr val="4758AB"/>
+                </a:solidFill>
+                <a:latin typeface="Courier"/>
+              </a:rPr>
+              <a:t>select</a:t>
+            </a:r>
+            <a:r>
+              <a:rPr b="1" dirty="0">
+                <a:solidFill>
+                  <a:srgbClr val="003B4F"/>
+                </a:solidFill>
+                <a:latin typeface="Courier"/>
+              </a:rPr>
+              <a:t>(</a:t>
+            </a:r>
+            <a:endParaRPr lang="fr-FR" b="1" dirty="0">
+              <a:solidFill>
+                <a:srgbClr val="003B4F"/>
+              </a:solidFill>
+              <a:latin typeface="Courier"/>
+            </a:endParaRPr>
+          </a:p>
+          <a:p>
+            <a:pPr indent="0">
+              <a:buNone/>
+            </a:pPr>
+            <a:r>
+              <a:rPr lang="fr-FR" b="1" dirty="0">
+                <a:solidFill>
+                  <a:srgbClr val="003B4F"/>
+                </a:solidFill>
+                <a:latin typeface="Courier"/>
+              </a:rPr>
+              <a:t>	</a:t>
+            </a:r>
+            <a:r>
+              <a:rPr b="1" dirty="0">
+                <a:solidFill>
+                  <a:srgbClr val="003B4F"/>
+                </a:solidFill>
+                <a:latin typeface="Courier"/>
+              </a:rPr>
+              <a:t>id, time, </a:t>
+            </a:r>
+            <a:endParaRPr lang="fr-FR" b="1" dirty="0">
+              <a:solidFill>
+                <a:srgbClr val="003B4F"/>
+              </a:solidFill>
+              <a:latin typeface="Courier"/>
+            </a:endParaRPr>
+          </a:p>
+          <a:p>
+            <a:pPr indent="0">
+              <a:buNone/>
+            </a:pPr>
+            <a:r>
+              <a:rPr lang="fr-FR" b="1" dirty="0">
+                <a:solidFill>
+                  <a:srgbClr val="003B4F"/>
+                </a:solidFill>
+                <a:latin typeface="Courier"/>
+              </a:rPr>
+              <a:t>	</a:t>
+            </a:r>
+            <a:r>
+              <a:rPr b="1" dirty="0">
+                <a:solidFill>
+                  <a:srgbClr val="003B4F"/>
+                </a:solidFill>
+                <a:latin typeface="Courier"/>
+              </a:rPr>
+              <a:t>status, IFNG)</a:t>
+            </a:r>
+          </a:p>
+          <a:p>
+            <a:pPr indent="0">
+              <a:buNone/>
+            </a:pPr>
+            <a:endParaRPr lang="fr-FR" dirty="0">
+              <a:latin typeface="Courier"/>
+            </a:endParaRPr>
+          </a:p>
+          <a:p>
+            <a:pPr indent="0">
+              <a:buNone/>
+            </a:pPr>
+            <a:r>
+              <a:rPr dirty="0">
+                <a:latin typeface="Courier"/>
+              </a:rPr>
+              <a:t># A </a:t>
+            </a:r>
+            <a:r>
+              <a:rPr dirty="0" err="1">
+                <a:latin typeface="Courier"/>
+              </a:rPr>
+              <a:t>tibble</a:t>
+            </a:r>
+            <a:r>
+              <a:rPr dirty="0">
+                <a:latin typeface="Courier"/>
+              </a:rPr>
+              <a:t>: 32 × 4
+# Groups:   id [13]
+   id     time status  IFNG
+   &lt;chr&gt; &lt;</a:t>
+            </a:r>
+            <a:r>
+              <a:rPr dirty="0" err="1">
+                <a:latin typeface="Courier"/>
+              </a:rPr>
+              <a:t>dbl</a:t>
+            </a:r>
+            <a:r>
+              <a:rPr dirty="0">
+                <a:latin typeface="Courier"/>
+              </a:rPr>
+              <a:t>&gt; &lt;chr&gt;  &lt;</a:t>
+            </a:r>
+            <a:r>
+              <a:rPr dirty="0" err="1">
+                <a:latin typeface="Courier"/>
+              </a:rPr>
+              <a:t>dbl</a:t>
+            </a:r>
+            <a:r>
+              <a:rPr dirty="0">
+                <a:latin typeface="Courier"/>
+              </a:rPr>
+              <a:t>&gt;
+ 1 HC59      0 HC      4.31
+ 2 HC60      0 HC      5.35</a:t>
+            </a:r>
+          </a:p>
+        </p:txBody>
+      </p:sp>
+      <p:sp>
+        <p:nvSpPr>
+          <p:cNvPr id="4" name="Content Placeholder 3"/>
+          <p:cNvSpPr>
+            <a:spLocks noGrp="1"/>
+          </p:cNvSpPr>
+          <p:nvPr>
+            <p:ph sz="half" idx="2"/>
+          </p:nvPr>
+        </p:nvSpPr>
+        <p:spPr/>
+        <p:txBody>
+          <a:bodyPr>
+            <a:normAutofit fontScale="70000" lnSpcReduction="20000"/>
+          </a:bodyPr>
+          <a:lstStyle/>
+          <a:p>
+            <a:pPr marL="0" indent="0">
+              <a:buNone/>
+            </a:pPr>
+            <a:r>
+              <a:rPr dirty="0"/>
+              <a:t>Summarizing with </a:t>
+            </a:r>
+            <a:r>
+              <a:rPr dirty="0">
+                <a:latin typeface="Courier"/>
+              </a:rPr>
+              <a:t>summarize</a:t>
+            </a:r>
+          </a:p>
+          <a:p>
+            <a:pPr indent="0">
+              <a:buNone/>
+            </a:pPr>
+            <a:r>
+              <a:rPr b="1" dirty="0">
+                <a:solidFill>
+                  <a:srgbClr val="003B4F"/>
+                </a:solidFill>
+                <a:latin typeface="Courier"/>
+              </a:rPr>
+              <a:t>covid </a:t>
+            </a:r>
+            <a:r>
+              <a:rPr b="1" dirty="0">
+                <a:solidFill>
+                  <a:srgbClr val="5E5E5E"/>
+                </a:solidFill>
+                <a:latin typeface="Courier"/>
+              </a:rPr>
+              <a:t>|&gt;</a:t>
+            </a:r>
+            <a:br>
+              <a:rPr b="1" dirty="0"/>
+            </a:br>
+            <a:r>
+              <a:rPr b="1" dirty="0">
+                <a:solidFill>
+                  <a:srgbClr val="003B4F"/>
+                </a:solidFill>
+                <a:latin typeface="Courier"/>
+              </a:rPr>
+              <a:t>  </a:t>
+            </a:r>
+            <a:r>
+              <a:rPr b="1" dirty="0" err="1">
+                <a:solidFill>
+                  <a:srgbClr val="4758AB"/>
+                </a:solidFill>
+                <a:latin typeface="Courier"/>
+              </a:rPr>
+              <a:t>group_by</a:t>
+            </a:r>
+            <a:r>
+              <a:rPr b="1" dirty="0">
+                <a:solidFill>
+                  <a:srgbClr val="003B4F"/>
+                </a:solidFill>
+                <a:latin typeface="Courier"/>
+              </a:rPr>
+              <a:t>(status) </a:t>
+            </a:r>
+            <a:r>
+              <a:rPr b="1" dirty="0">
+                <a:solidFill>
+                  <a:srgbClr val="5E5E5E"/>
+                </a:solidFill>
+                <a:latin typeface="Courier"/>
+              </a:rPr>
+              <a:t>|&gt;</a:t>
+            </a:r>
+            <a:br>
+              <a:rPr b="1" dirty="0"/>
+            </a:br>
+            <a:r>
+              <a:rPr b="1" dirty="0">
+                <a:solidFill>
+                  <a:srgbClr val="003B4F"/>
+                </a:solidFill>
+                <a:latin typeface="Courier"/>
+              </a:rPr>
+              <a:t>  </a:t>
+            </a:r>
+            <a:r>
+              <a:rPr b="1" dirty="0">
+                <a:solidFill>
+                  <a:srgbClr val="4758AB"/>
+                </a:solidFill>
+                <a:latin typeface="Courier"/>
+              </a:rPr>
+              <a:t>summarize</a:t>
+            </a:r>
+            <a:r>
+              <a:rPr b="1" dirty="0">
+                <a:solidFill>
+                  <a:srgbClr val="003B4F"/>
+                </a:solidFill>
+                <a:latin typeface="Courier"/>
+              </a:rPr>
+              <a:t>(</a:t>
+            </a:r>
+            <a:endParaRPr lang="fr-FR" b="1" dirty="0">
+              <a:solidFill>
+                <a:srgbClr val="003B4F"/>
+              </a:solidFill>
+              <a:latin typeface="Courier"/>
+            </a:endParaRPr>
+          </a:p>
+          <a:p>
+            <a:pPr indent="0">
+              <a:buNone/>
+            </a:pPr>
+            <a:r>
+              <a:rPr lang="fr-FR" b="1" dirty="0">
+                <a:solidFill>
+                  <a:srgbClr val="003B4F"/>
+                </a:solidFill>
+                <a:latin typeface="Courier"/>
+              </a:rPr>
+              <a:t>	</a:t>
+            </a:r>
+            <a:r>
+              <a:rPr b="1" dirty="0" err="1">
+                <a:solidFill>
+                  <a:srgbClr val="657422"/>
+                </a:solidFill>
+                <a:latin typeface="Courier"/>
+              </a:rPr>
+              <a:t>mean_IFNG</a:t>
+            </a:r>
+            <a:r>
+              <a:rPr b="1" dirty="0">
+                <a:solidFill>
+                  <a:srgbClr val="657422"/>
+                </a:solidFill>
+                <a:latin typeface="Courier"/>
+              </a:rPr>
+              <a:t> =</a:t>
+            </a:r>
+            <a:r>
+              <a:rPr b="1" dirty="0">
+                <a:solidFill>
+                  <a:srgbClr val="003B4F"/>
+                </a:solidFill>
+                <a:latin typeface="Courier"/>
+              </a:rPr>
+              <a:t> </a:t>
+            </a:r>
+            <a:r>
+              <a:rPr b="1" dirty="0">
+                <a:solidFill>
+                  <a:srgbClr val="4758AB"/>
+                </a:solidFill>
+                <a:latin typeface="Courier"/>
+              </a:rPr>
               <a:t>mean</a:t>
             </a:r>
             <a:r>
-              <a:rPr lang="fr-FR" dirty="0"/>
-              <a:t> expression of IL1R1 </a:t>
-            </a:r>
-            <a:r>
-              <a:rPr lang="fr-FR" dirty="0" err="1"/>
-              <a:t>healthy</a:t>
-            </a:r>
-            <a:r>
-              <a:rPr lang="fr-FR" dirty="0"/>
-              <a:t> </a:t>
-            </a:r>
-            <a:r>
-              <a:rPr lang="fr-FR" dirty="0" err="1"/>
-              <a:t>controls</a:t>
-            </a:r>
-            <a:r>
-              <a:rPr lang="fr-FR" dirty="0"/>
-              <a:t> </a:t>
-            </a:r>
-            <a:r>
-              <a:rPr lang="fr-FR" dirty="0" err="1"/>
-              <a:t>using</a:t>
-            </a:r>
-            <a:r>
-              <a:rPr lang="fr-FR" dirty="0"/>
-              <a:t> pipes and </a:t>
-            </a:r>
-            <a:r>
-              <a:rPr lang="fr-FR" dirty="0" err="1"/>
-              <a:t>dplyr</a:t>
-            </a:r>
-            <a:r>
-              <a:rPr lang="fr-FR" dirty="0"/>
-              <a:t> </a:t>
-            </a:r>
-            <a:r>
-              <a:rPr lang="fr-FR" dirty="0" err="1"/>
-              <a:t>verbs</a:t>
-            </a:r>
-            <a:r>
-              <a:rPr lang="fr-FR" dirty="0"/>
-              <a:t> (or base R if </a:t>
-            </a:r>
-            <a:r>
-              <a:rPr lang="fr-FR" dirty="0" err="1"/>
-              <a:t>you</a:t>
-            </a:r>
-            <a:r>
-              <a:rPr lang="fr-FR" dirty="0"/>
-              <a:t> </a:t>
-            </a:r>
-            <a:r>
-              <a:rPr lang="fr-FR" dirty="0" err="1"/>
-              <a:t>prefer</a:t>
-            </a:r>
-            <a:r>
-              <a:rPr lang="fr-FR" dirty="0"/>
-              <a:t>).</a:t>
-            </a:r>
-          </a:p>
-          <a:p>
-            <a:pPr marL="0" indent="0">
+              <a:rPr b="1" dirty="0">
+                <a:solidFill>
+                  <a:srgbClr val="003B4F"/>
+                </a:solidFill>
+                <a:latin typeface="Courier"/>
+              </a:rPr>
+              <a:t>(IFNG))</a:t>
+            </a:r>
+          </a:p>
+          <a:p>
+            <a:pPr indent="0">
               <a:buNone/>
             </a:pPr>
-            <a:endParaRPr lang="fr-FR" dirty="0"/>
-          </a:p>
-          <a:p>
-            <a:pPr marL="0" indent="0">
+            <a:endParaRPr lang="fr-FR" dirty="0">
+              <a:latin typeface="Courier"/>
+            </a:endParaRPr>
+          </a:p>
+          <a:p>
+            <a:pPr indent="0">
               <a:buNone/>
             </a:pPr>
-            <a:r>
-              <a:rPr lang="fr-FR" i="1" dirty="0"/>
-              <a:t>NB: To do </a:t>
-            </a:r>
-            <a:r>
-              <a:rPr lang="fr-FR" i="1" dirty="0" err="1"/>
-              <a:t>that</a:t>
-            </a:r>
-            <a:r>
-              <a:rPr lang="fr-FR" i="1" dirty="0"/>
-              <a:t>, </a:t>
-            </a:r>
-            <a:r>
-              <a:rPr lang="fr-FR" i="1" dirty="0" err="1"/>
-              <a:t>you</a:t>
-            </a:r>
-            <a:r>
-              <a:rPr lang="fr-FR" i="1" dirty="0"/>
-              <a:t> </a:t>
-            </a:r>
-            <a:r>
-              <a:rPr lang="fr-FR" i="1" dirty="0" err="1"/>
-              <a:t>may</a:t>
-            </a:r>
-            <a:r>
-              <a:rPr lang="fr-FR" i="1" dirty="0"/>
-              <a:t> </a:t>
-            </a:r>
-            <a:r>
-              <a:rPr lang="fr-FR" i="1" dirty="0" err="1"/>
-              <a:t>want</a:t>
-            </a:r>
-            <a:r>
-              <a:rPr lang="fr-FR" i="1" dirty="0"/>
-              <a:t> to use </a:t>
-            </a:r>
-            <a:r>
-              <a:rPr lang="fr-FR" i="1" dirty="0" err="1"/>
-              <a:t>dplyr</a:t>
-            </a:r>
-            <a:r>
-              <a:rPr lang="fr-FR" i="1" dirty="0"/>
-              <a:t>::</a:t>
-            </a:r>
-            <a:r>
-              <a:rPr lang="fr-FR" i="1" dirty="0" err="1"/>
-              <a:t>summarize</a:t>
-            </a:r>
-            <a:r>
-              <a:rPr lang="fr-FR" i="1" dirty="0"/>
-              <a:t>(), but </a:t>
-            </a:r>
-            <a:r>
-              <a:rPr lang="fr-FR" i="1" dirty="0" err="1"/>
-              <a:t>it</a:t>
-            </a:r>
-            <a:r>
-              <a:rPr lang="fr-FR" i="1" dirty="0"/>
-              <a:t> </a:t>
-            </a:r>
-            <a:r>
-              <a:rPr lang="fr-FR" i="1" dirty="0" err="1"/>
-              <a:t>is</a:t>
-            </a:r>
-            <a:r>
-              <a:rPr lang="fr-FR" i="1" dirty="0"/>
-              <a:t> not </a:t>
-            </a:r>
-            <a:r>
-              <a:rPr lang="fr-FR" i="1" dirty="0" err="1"/>
-              <a:t>mandatory</a:t>
-            </a:r>
-            <a:r>
-              <a:rPr lang="fr-FR" i="1" dirty="0"/>
-              <a:t>.</a:t>
+            <a:endParaRPr lang="fr-FR" dirty="0">
+              <a:latin typeface="Courier"/>
+            </a:endParaRPr>
+          </a:p>
+          <a:p>
+            <a:pPr indent="0">
+              <a:buNone/>
+            </a:pPr>
+            <a:r>
+              <a:rPr dirty="0">
+                <a:latin typeface="Courier"/>
+              </a:rPr>
+              <a:t># A </a:t>
+            </a:r>
+            <a:r>
+              <a:rPr dirty="0" err="1">
+                <a:latin typeface="Courier"/>
+              </a:rPr>
+              <a:t>tibble</a:t>
+            </a:r>
+            <a:r>
+              <a:rPr dirty="0">
+                <a:latin typeface="Courier"/>
+              </a:rPr>
+              <a:t>: 2 × 2
+  status </a:t>
+            </a:r>
+            <a:r>
+              <a:rPr dirty="0" err="1">
+                <a:latin typeface="Courier"/>
+              </a:rPr>
+              <a:t>mean_IFNG</a:t>
+            </a:r>
+            <a:r>
+              <a:rPr dirty="0">
+                <a:latin typeface="Courier"/>
+              </a:rPr>
+              <a:t>
+  &lt;chr&gt;      &lt;</a:t>
+            </a:r>
+            <a:r>
+              <a:rPr dirty="0" err="1">
+                <a:latin typeface="Courier"/>
+              </a:rPr>
+              <a:t>dbl</a:t>
+            </a:r>
+            <a:r>
+              <a:rPr dirty="0">
+                <a:latin typeface="Courier"/>
+              </a:rPr>
+              <a:t>&gt;
+1 HC          4.99
+2 </a:t>
+            </a:r>
+            <a:r>
+              <a:rPr dirty="0" err="1">
+                <a:latin typeface="Courier"/>
+              </a:rPr>
+              <a:t>nCOV</a:t>
+            </a:r>
+            <a:r>
+              <a:rPr dirty="0">
+                <a:latin typeface="Courier"/>
+              </a:rPr>
+              <a:t>        4.12</a:t>
             </a:r>
           </a:p>
         </p:txBody>
       </p:sp>
     </p:spTree>
-    <p:extLst>
-      <p:ext uri="{BB962C8B-B14F-4D97-AF65-F5344CB8AC3E}">
-        <p14:creationId xmlns:p14="http://schemas.microsoft.com/office/powerpoint/2010/main" val="294582375"/>
-      </p:ext>
-    </p:extLst>
   </p:cSld>
   <p:clrMapOvr>
     <a:masterClrMapping/>

--- a/01R/02_dplyr_intro.pptx
+++ b/01R/02_dplyr_intro.pptx
@@ -268,7 +268,7 @@
           <a:p>
             <a:fld id="{B6CC3139-8B8E-A041-A6E2-4AFC575B6FE3}" type="datetimeFigureOut">
               <a:rPr lang="fr-FR" smtClean="0"/>
-              <a:t>29/05/2025</a:t>
+              <a:t>01/06/2025</a:t>
             </a:fld>
             <a:endParaRPr lang="fr-FR"/>
           </a:p>
@@ -466,7 +466,7 @@
           <a:p>
             <a:fld id="{B6CC3139-8B8E-A041-A6E2-4AFC575B6FE3}" type="datetimeFigureOut">
               <a:rPr lang="fr-FR" smtClean="0"/>
-              <a:t>31/05/2025</a:t>
+              <a:t>01/06/2025</a:t>
             </a:fld>
             <a:endParaRPr lang="fr-FR"/>
           </a:p>
@@ -674,7 +674,7 @@
           <a:p>
             <a:fld id="{B6CC3139-8B8E-A041-A6E2-4AFC575B6FE3}" type="datetimeFigureOut">
               <a:rPr lang="fr-FR" smtClean="0"/>
-              <a:t>31/05/2025</a:t>
+              <a:t>01/06/2025</a:t>
             </a:fld>
             <a:endParaRPr lang="fr-FR"/>
           </a:p>
@@ -872,7 +872,7 @@
           <a:p>
             <a:fld id="{B6CC3139-8B8E-A041-A6E2-4AFC575B6FE3}" type="datetimeFigureOut">
               <a:rPr lang="fr-FR" smtClean="0"/>
-              <a:t>29/05/2025</a:t>
+              <a:t>01/06/2025</a:t>
             </a:fld>
             <a:endParaRPr lang="fr-FR"/>
           </a:p>
@@ -1147,7 +1147,7 @@
           <a:p>
             <a:fld id="{B6CC3139-8B8E-A041-A6E2-4AFC575B6FE3}" type="datetimeFigureOut">
               <a:rPr lang="fr-FR" smtClean="0"/>
-              <a:t>29/05/2025</a:t>
+              <a:t>01/06/2025</a:t>
             </a:fld>
             <a:endParaRPr lang="fr-FR"/>
           </a:p>
@@ -1412,7 +1412,7 @@
           <a:p>
             <a:fld id="{B6CC3139-8B8E-A041-A6E2-4AFC575B6FE3}" type="datetimeFigureOut">
               <a:rPr lang="fr-FR" smtClean="0"/>
-              <a:t>29/05/2025</a:t>
+              <a:t>01/06/2025</a:t>
             </a:fld>
             <a:endParaRPr lang="fr-FR"/>
           </a:p>
@@ -1824,7 +1824,7 @@
           <a:p>
             <a:fld id="{B6CC3139-8B8E-A041-A6E2-4AFC575B6FE3}" type="datetimeFigureOut">
               <a:rPr lang="fr-FR" smtClean="0"/>
-              <a:t>31/05/2025</a:t>
+              <a:t>01/06/2025</a:t>
             </a:fld>
             <a:endParaRPr lang="fr-FR"/>
           </a:p>
@@ -1965,7 +1965,7 @@
           <a:p>
             <a:fld id="{B6CC3139-8B8E-A041-A6E2-4AFC575B6FE3}" type="datetimeFigureOut">
               <a:rPr lang="fr-FR" smtClean="0"/>
-              <a:t>31/05/2025</a:t>
+              <a:t>01/06/2025</a:t>
             </a:fld>
             <a:endParaRPr lang="fr-FR"/>
           </a:p>
@@ -2078,7 +2078,7 @@
           <a:p>
             <a:fld id="{B6CC3139-8B8E-A041-A6E2-4AFC575B6FE3}" type="datetimeFigureOut">
               <a:rPr lang="fr-FR" smtClean="0"/>
-              <a:t>29/05/2025</a:t>
+              <a:t>01/06/2025</a:t>
             </a:fld>
             <a:endParaRPr lang="fr-FR"/>
           </a:p>
@@ -2389,7 +2389,7 @@
           <a:p>
             <a:fld id="{B6CC3139-8B8E-A041-A6E2-4AFC575B6FE3}" type="datetimeFigureOut">
               <a:rPr lang="fr-FR" smtClean="0"/>
-              <a:t>29/05/2025</a:t>
+              <a:t>01/06/2025</a:t>
             </a:fld>
             <a:endParaRPr lang="fr-FR"/>
           </a:p>
@@ -2677,7 +2677,7 @@
           <a:p>
             <a:fld id="{B6CC3139-8B8E-A041-A6E2-4AFC575B6FE3}" type="datetimeFigureOut">
               <a:rPr lang="fr-FR" smtClean="0"/>
-              <a:t>31/05/2025</a:t>
+              <a:t>01/06/2025</a:t>
             </a:fld>
             <a:endParaRPr lang="fr-FR"/>
           </a:p>
@@ -2918,7 +2918,7 @@
           <a:p>
             <a:fld id="{B6CC3139-8B8E-A041-A6E2-4AFC575B6FE3}" type="datetimeFigureOut">
               <a:rPr lang="fr-FR" smtClean="0"/>
-              <a:t>29/05/2025</a:t>
+              <a:t>01/06/2025</a:t>
             </a:fld>
             <a:endParaRPr lang="fr-FR"/>
           </a:p>
@@ -4083,31 +4083,33 @@
         </p:nvSpPr>
         <p:spPr/>
         <p:txBody>
-          <a:bodyPr/>
-          <a:lstStyle/>
-          <a:p>
-            <a:r>
-              <a:rPr lang="fr-FR" dirty="0" err="1"/>
+          <a:bodyPr>
+            <a:normAutofit/>
+          </a:bodyPr>
+          <a:lstStyle/>
+          <a:p>
+            <a:r>
+              <a:rPr lang="fr-FR" sz="3600" dirty="0" err="1"/>
               <a:t>What</a:t>
             </a:r>
             <a:r>
-              <a:rPr lang="fr-FR" dirty="0"/>
+              <a:rPr lang="fr-FR" sz="3600" dirty="0"/>
               <a:t> </a:t>
             </a:r>
             <a:r>
-              <a:rPr lang="fr-FR" dirty="0" err="1"/>
+              <a:rPr lang="fr-FR" sz="3600" dirty="0" err="1"/>
               <a:t>is</a:t>
             </a:r>
             <a:r>
-              <a:rPr lang="fr-FR" dirty="0"/>
+              <a:rPr lang="fr-FR" sz="3600" dirty="0"/>
               <a:t> a </a:t>
             </a:r>
             <a:r>
-              <a:rPr lang="fr-FR" dirty="0" err="1"/>
+              <a:rPr lang="fr-FR" sz="3600" dirty="0" err="1"/>
               <a:t>tibble</a:t>
             </a:r>
             <a:r>
-              <a:rPr lang="fr-FR" dirty="0"/>
+              <a:rPr lang="fr-FR" sz="3600" dirty="0"/>
               <a:t>?</a:t>
             </a:r>
           </a:p>
@@ -4167,45 +4169,45 @@
           <a:lstStyle/>
           <a:p>
             <a:r>
-              <a:rPr lang="en-US" i="1" dirty="0"/>
+              <a:rPr lang="en-US" sz="1800" i="1" dirty="0"/>
               <a:t>“</a:t>
             </a:r>
             <a:r>
-              <a:rPr lang="en-US" i="1" noProof="0" dirty="0"/>
+              <a:rPr lang="en-US" sz="1800" i="1" noProof="0" dirty="0"/>
               <a:t>stricter checking and better formatting than the traditional data frame.”</a:t>
             </a:r>
           </a:p>
           <a:p>
             <a:r>
-              <a:rPr lang="en-US" dirty="0"/>
+              <a:rPr lang="en-US" sz="1800" dirty="0"/>
               <a:t>In practice: no very very big difference with our usual </a:t>
             </a:r>
             <a:r>
-              <a:rPr lang="en-US" dirty="0" err="1"/>
+              <a:rPr lang="en-US" sz="1800" dirty="0" err="1"/>
               <a:t>dataframes</a:t>
             </a:r>
             <a:r>
-              <a:rPr lang="en-US" dirty="0"/>
+              <a:rPr lang="en-US" sz="1800" dirty="0"/>
               <a:t>…</a:t>
             </a:r>
           </a:p>
           <a:p>
             <a:r>
-              <a:rPr lang="en-US" b="1" dirty="0"/>
+              <a:rPr lang="en-US" sz="1800" b="1" dirty="0"/>
               <a:t>BUT… </a:t>
             </a:r>
             <a:r>
-              <a:rPr lang="en-US" b="1" u="sng" dirty="0"/>
+              <a:rPr lang="en-US" sz="1800" b="1" u="sng" dirty="0"/>
               <a:t>no row names</a:t>
             </a:r>
             <a:r>
-              <a:rPr lang="en-US" b="1" dirty="0"/>
+              <a:rPr lang="en-US" sz="1800" b="1" dirty="0"/>
               <a:t>!</a:t>
             </a:r>
           </a:p>
           <a:p>
             <a:r>
-              <a:rPr lang="en-US" dirty="0"/>
+              <a:rPr lang="en-US" sz="1800" dirty="0"/>
               <a:t>Going back and forth:</a:t>
             </a:r>
           </a:p>
@@ -4215,14 +4217,14 @@
               <a:buChar char="•"/>
             </a:pPr>
             <a:r>
-              <a:rPr lang="en-US" dirty="0"/>
+              <a:rPr lang="en-US" sz="1800" dirty="0"/>
               <a:t>base::</a:t>
             </a:r>
             <a:r>
-              <a:rPr lang="en-US" dirty="0" err="1"/>
+              <a:rPr lang="en-US" sz="1800" dirty="0" err="1"/>
               <a:t>as.data.frame</a:t>
             </a:r>
-            <a:endParaRPr lang="en-US" dirty="0"/>
+            <a:endParaRPr lang="en-US" sz="1800" dirty="0"/>
           </a:p>
           <a:p>
             <a:pPr marL="285750" indent="-285750">
@@ -4230,31 +4232,31 @@
               <a:buChar char="•"/>
             </a:pPr>
             <a:r>
-              <a:rPr lang="en-US" dirty="0" err="1"/>
+              <a:rPr lang="en-US" sz="1800" dirty="0" err="1"/>
               <a:t>tibble</a:t>
             </a:r>
             <a:r>
-              <a:rPr lang="en-US" dirty="0"/>
+              <a:rPr lang="en-US" sz="1800" dirty="0"/>
               <a:t>::</a:t>
             </a:r>
             <a:r>
-              <a:rPr lang="en-US" dirty="0" err="1"/>
+              <a:rPr lang="en-US" sz="1800" dirty="0" err="1"/>
               <a:t>as_tibble</a:t>
             </a:r>
-            <a:endParaRPr lang="en-US" dirty="0"/>
+            <a:endParaRPr lang="en-US" sz="1800" dirty="0"/>
           </a:p>
           <a:p>
             <a:pPr marL="285750" indent="-285750">
               <a:buFont typeface="Arial" panose="020B0604020202020204" pitchFamily="34" charset="0"/>
               <a:buChar char="•"/>
             </a:pPr>
-            <a:endParaRPr lang="en-US" dirty="0"/>
-          </a:p>
-          <a:p>
-            <a:endParaRPr lang="en-US" dirty="0"/>
-          </a:p>
-          <a:p>
-            <a:endParaRPr lang="en-US" dirty="0"/>
+            <a:endParaRPr lang="en-US" sz="1800" dirty="0"/>
+          </a:p>
+          <a:p>
+            <a:endParaRPr lang="en-US" sz="1800" dirty="0"/>
+          </a:p>
+          <a:p>
+            <a:endParaRPr lang="en-US" sz="1800" dirty="0"/>
           </a:p>
         </p:txBody>
       </p:sp>
@@ -4757,6 +4759,86 @@
                                           <p:spTgt spid="4">
                                             <p:txEl>
                                               <p:pRg st="4" end="4"/>
+                                            </p:txEl>
+                                          </p:spTgt>
+                                        </p:tgtEl>
+                                        <p:attrNameLst>
+                                          <p:attrName>style.visibility</p:attrName>
+                                        </p:attrNameLst>
+                                      </p:cBhvr>
+                                      <p:to>
+                                        <p:strVal val="visible"/>
+                                      </p:to>
+                                    </p:set>
+                                  </p:childTnLst>
+                                </p:cTn>
+                              </p:par>
+                            </p:childTnLst>
+                          </p:cTn>
+                        </p:par>
+                      </p:childTnLst>
+                    </p:cTn>
+                  </p:par>
+                  <p:par>
+                    <p:cTn id="19" fill="hold">
+                      <p:stCondLst>
+                        <p:cond delay="indefinite"/>
+                      </p:stCondLst>
+                      <p:childTnLst>
+                        <p:par>
+                          <p:cTn id="20" fill="hold">
+                            <p:stCondLst>
+                              <p:cond delay="0"/>
+                            </p:stCondLst>
+                            <p:childTnLst>
+                              <p:par>
+                                <p:cTn id="21" presetID="1" presetClass="entr" presetSubtype="0" fill="hold" nodeType="clickEffect">
+                                  <p:stCondLst>
+                                    <p:cond delay="0"/>
+                                  </p:stCondLst>
+                                  <p:childTnLst>
+                                    <p:set>
+                                      <p:cBhvr>
+                                        <p:cTn id="22" dur="1" fill="hold">
+                                          <p:stCondLst>
+                                            <p:cond delay="0"/>
+                                          </p:stCondLst>
+                                        </p:cTn>
+                                        <p:tgtEl>
+                                          <p:spTgt spid="4">
+                                            <p:txEl>
+                                              <p:pRg st="0" end="0"/>
+                                            </p:txEl>
+                                          </p:spTgt>
+                                        </p:tgtEl>
+                                        <p:attrNameLst>
+                                          <p:attrName>style.visibility</p:attrName>
+                                        </p:attrNameLst>
+                                      </p:cBhvr>
+                                      <p:to>
+                                        <p:strVal val="visible"/>
+                                      </p:to>
+                                    </p:set>
+                                  </p:childTnLst>
+                                </p:cTn>
+                              </p:par>
+                              <p:par>
+                                <p:cTn id="23" presetID="1" presetClass="entr" presetSubtype="0" fill="hold" nodeType="withEffect">
+                                  <p:stCondLst>
+                                    <p:cond delay="0"/>
+                                  </p:stCondLst>
+                                  <p:childTnLst>
+                                    <p:set>
+                                      <p:cBhvr>
+                                        <p:cTn id="24" dur="1" fill="hold">
+                                          <p:stCondLst>
+                                            <p:cond delay="0"/>
+                                          </p:stCondLst>
+                                        </p:cTn>
+                                        <p:tgtEl>
+                                          <p:spTgt spid="4">
+                                            <p:txEl>
+                                              <p:pRg st="1" end="1"/>
                                             </p:txEl>
                                           </p:spTgt>
                                         </p:tgtEl>
